--- a/examples/tier_comparison_demo/company_bundle/company_bundle_BASIC.pptx
+++ b/examples/tier_comparison_demo/company_bundle/company_bundle_BASIC.pptx
@@ -3187,7 +3187,7 @@
               </a:defRPr>
             </a:pPr>
             <a:r>
-              <a:t>Trailing PE Grows 762.8% to $89.6 Average</a:t>
+              <a:t>SummaryAnalysis</a:t>
             </a:r>
           </a:p>
         </p:txBody>
@@ -3240,7 +3240,7 @@
               </a:defRPr>
             </a:pPr>
             <a:r>
-              <a:t>AAPL Prices Soar 155.5% in Growth</a:t>
+              <a:t>AAPL_PricesAnalysis</a:t>
             </a:r>
           </a:p>
         </p:txBody>
@@ -3293,7 +3293,7 @@
               </a:defRPr>
             </a:pPr>
             <a:r>
-              <a:t>Operating Income Peaks at $123.2B</a:t>
+              <a:t>AAPL_Income_AAnalysis</a:t>
             </a:r>
           </a:p>
         </p:txBody>
@@ -3346,7 +3346,7 @@
               </a:defRPr>
             </a:pPr>
             <a:r>
-              <a:t>Debt Soars 28% to $136.5B</a:t>
+              <a:t>AAPL_BS_AAnalysis</a:t>
             </a:r>
           </a:p>
         </p:txBody>
